--- a/Reporte 140726.pptx
+++ b/Reporte 140726.pptx
@@ -7245,10 +7245,10 @@
       </p:sp>
       <p:pic>
         <p:nvPicPr>
-          <p:cNvPr id="3" name="Imagen 2">
+          <p:cNvPr id="4" name="Imagen 3">
             <a:extLst>
               <a:ext uri="{FF2B5EF4-FFF2-40B4-BE49-F238E27FC236}">
-                <a16:creationId xmlns:a16="http://schemas.microsoft.com/office/drawing/2014/main" id="{8F71CC34-D850-3F97-6438-B25A4CF15394}"/>
+                <a16:creationId xmlns:a16="http://schemas.microsoft.com/office/drawing/2014/main" id="{9E010DB7-DAAD-E6E5-348C-62F1BC751AF6}"/>
               </a:ext>
             </a:extLst>
           </p:cNvPr>
@@ -7265,8 +7265,8 @@
         </p:blipFill>
         <p:spPr>
           <a:xfrm>
-            <a:off x="0" y="940376"/>
-            <a:ext cx="9144000" cy="3405623"/>
+            <a:off x="0" y="937955"/>
+            <a:ext cx="9144000" cy="3410465"/>
           </a:xfrm>
           <a:prstGeom prst="rect">
             <a:avLst/>
@@ -7359,10 +7359,10 @@
       </p:sp>
       <p:pic>
         <p:nvPicPr>
-          <p:cNvPr id="3" name="Imagen 2">
+          <p:cNvPr id="4" name="Imagen 3">
             <a:extLst>
               <a:ext uri="{FF2B5EF4-FFF2-40B4-BE49-F238E27FC236}">
-                <a16:creationId xmlns:a16="http://schemas.microsoft.com/office/drawing/2014/main" id="{CB0EAAB0-F9F0-0B30-E9B8-24EC0FC75455}"/>
+                <a16:creationId xmlns:a16="http://schemas.microsoft.com/office/drawing/2014/main" id="{B670C51F-18B2-A1F4-D5F7-5D024952B010}"/>
               </a:ext>
             </a:extLst>
           </p:cNvPr>
@@ -7379,8 +7379,8 @@
         </p:blipFill>
         <p:spPr>
           <a:xfrm>
-            <a:off x="0" y="1417524"/>
-            <a:ext cx="9144000" cy="2451328"/>
+            <a:off x="0" y="1418011"/>
+            <a:ext cx="9144000" cy="2450353"/>
           </a:xfrm>
           <a:prstGeom prst="rect">
             <a:avLst/>
@@ -7473,10 +7473,10 @@
       </p:sp>
       <p:pic>
         <p:nvPicPr>
-          <p:cNvPr id="2" name="Imagen 1">
+          <p:cNvPr id="3" name="Imagen 2">
             <a:extLst>
               <a:ext uri="{FF2B5EF4-FFF2-40B4-BE49-F238E27FC236}">
-                <a16:creationId xmlns:a16="http://schemas.microsoft.com/office/drawing/2014/main" id="{F23CDA48-4512-E768-14CD-20B6F7CD4169}"/>
+                <a16:creationId xmlns:a16="http://schemas.microsoft.com/office/drawing/2014/main" id="{24790104-594D-739F-18E5-CDB919E0ECB7}"/>
               </a:ext>
             </a:extLst>
           </p:cNvPr>
@@ -7583,10 +7583,10 @@
       </p:sp>
       <p:pic>
         <p:nvPicPr>
-          <p:cNvPr id="4" name="Imagen 3">
+          <p:cNvPr id="3" name="Imagen 2">
             <a:extLst>
               <a:ext uri="{FF2B5EF4-FFF2-40B4-BE49-F238E27FC236}">
-                <a16:creationId xmlns:a16="http://schemas.microsoft.com/office/drawing/2014/main" id="{87030CB8-8235-FCBC-C987-8854BB832A11}"/>
+                <a16:creationId xmlns:a16="http://schemas.microsoft.com/office/drawing/2014/main" id="{C9B761C1-CD9C-8EF4-9538-37BAAF50B1D3}"/>
               </a:ext>
             </a:extLst>
           </p:cNvPr>
@@ -7603,8 +7603,8 @@
         </p:blipFill>
         <p:spPr>
           <a:xfrm>
-            <a:off x="604284" y="618843"/>
-            <a:ext cx="7935432" cy="4048690"/>
+            <a:off x="0" y="1196877"/>
+            <a:ext cx="9144000" cy="3037746"/>
           </a:xfrm>
           <a:prstGeom prst="rect">
             <a:avLst/>
@@ -7697,10 +7697,10 @@
       </p:sp>
       <p:pic>
         <p:nvPicPr>
-          <p:cNvPr id="4" name="Imagen 3">
+          <p:cNvPr id="3" name="Imagen 2">
             <a:extLst>
               <a:ext uri="{FF2B5EF4-FFF2-40B4-BE49-F238E27FC236}">
-                <a16:creationId xmlns:a16="http://schemas.microsoft.com/office/drawing/2014/main" id="{950DBE7F-0FAC-E70A-D6FE-B6CB8A3ED9ED}"/>
+                <a16:creationId xmlns:a16="http://schemas.microsoft.com/office/drawing/2014/main" id="{173CA884-A958-56FE-8906-B58E45267877}"/>
               </a:ext>
             </a:extLst>
           </p:cNvPr>
@@ -7717,8 +7717,8 @@
         </p:blipFill>
         <p:spPr>
           <a:xfrm>
-            <a:off x="0" y="921266"/>
-            <a:ext cx="9144000" cy="3443844"/>
+            <a:off x="0" y="946287"/>
+            <a:ext cx="9144000" cy="3393802"/>
           </a:xfrm>
           <a:prstGeom prst="rect">
             <a:avLst/>
@@ -7811,10 +7811,10 @@
       </p:sp>
       <p:pic>
         <p:nvPicPr>
-          <p:cNvPr id="2" name="Imagen 1">
+          <p:cNvPr id="3" name="Imagen 2">
             <a:extLst>
               <a:ext uri="{FF2B5EF4-FFF2-40B4-BE49-F238E27FC236}">
-                <a16:creationId xmlns:a16="http://schemas.microsoft.com/office/drawing/2014/main" id="{6E1DC672-B864-A1AB-6265-E9444A84111D}"/>
+                <a16:creationId xmlns:a16="http://schemas.microsoft.com/office/drawing/2014/main" id="{EF62C777-B11D-C724-18AD-7659A14B5DEE}"/>
               </a:ext>
             </a:extLst>
           </p:cNvPr>
@@ -7925,10 +7925,10 @@
       </p:sp>
       <p:pic>
         <p:nvPicPr>
-          <p:cNvPr id="2" name="Imagen 1">
+          <p:cNvPr id="3" name="Imagen 2">
             <a:extLst>
               <a:ext uri="{FF2B5EF4-FFF2-40B4-BE49-F238E27FC236}">
-                <a16:creationId xmlns:a16="http://schemas.microsoft.com/office/drawing/2014/main" id="{B5D00507-B2D1-9361-90DA-46C36E8BB217}"/>
+                <a16:creationId xmlns:a16="http://schemas.microsoft.com/office/drawing/2014/main" id="{B94AF0DD-441F-1044-19A4-3A880E13C43B}"/>
               </a:ext>
             </a:extLst>
           </p:cNvPr>
@@ -7945,8 +7945,8 @@
         </p:blipFill>
         <p:spPr>
           <a:xfrm>
-            <a:off x="1106488" y="914940"/>
-            <a:ext cx="6858000" cy="3456495"/>
+            <a:off x="1050373" y="886658"/>
+            <a:ext cx="6970230" cy="3513060"/>
           </a:xfrm>
           <a:prstGeom prst="rect">
             <a:avLst/>
@@ -8035,10 +8035,10 @@
       </p:sp>
       <p:pic>
         <p:nvPicPr>
-          <p:cNvPr id="4" name="Imagen 3">
+          <p:cNvPr id="3" name="Imagen 2">
             <a:extLst>
               <a:ext uri="{FF2B5EF4-FFF2-40B4-BE49-F238E27FC236}">
-                <a16:creationId xmlns:a16="http://schemas.microsoft.com/office/drawing/2014/main" id="{C946E2EC-D16E-99F8-B63C-C50077414A30}"/>
+                <a16:creationId xmlns:a16="http://schemas.microsoft.com/office/drawing/2014/main" id="{69CB98DA-790A-EFA0-C903-2E20301E0D11}"/>
               </a:ext>
             </a:extLst>
           </p:cNvPr>
@@ -8055,8 +8055,8 @@
         </p:blipFill>
         <p:spPr>
           <a:xfrm>
-            <a:off x="2022896" y="1220618"/>
-            <a:ext cx="5025181" cy="2845139"/>
+            <a:off x="558245" y="899869"/>
+            <a:ext cx="7954485" cy="3486637"/>
           </a:xfrm>
           <a:prstGeom prst="rect">
             <a:avLst/>

--- a/Reporte 140726.pptx
+++ b/Reporte 140726.pptx
@@ -6575,10 +6575,10 @@
       </p:sp>
       <p:pic>
         <p:nvPicPr>
-          <p:cNvPr id="7" name="Imagen 6">
+          <p:cNvPr id="4" name="Imagen 3">
             <a:extLst>
               <a:ext uri="{FF2B5EF4-FFF2-40B4-BE49-F238E27FC236}">
-                <a16:creationId xmlns:a16="http://schemas.microsoft.com/office/drawing/2014/main" id="{22E36215-DB61-D433-0C35-893B04B0D9C6}"/>
+                <a16:creationId xmlns:a16="http://schemas.microsoft.com/office/drawing/2014/main" id="{D3D84AA7-CD3E-E8B2-E97D-B4708A48EBBC}"/>
               </a:ext>
             </a:extLst>
           </p:cNvPr>
@@ -6595,8 +6595,8 @@
         </p:blipFill>
         <p:spPr>
           <a:xfrm>
-            <a:off x="-6725" y="973965"/>
-            <a:ext cx="9144000" cy="3338446"/>
+            <a:off x="0" y="940092"/>
+            <a:ext cx="9144000" cy="3406191"/>
           </a:xfrm>
           <a:prstGeom prst="rect">
             <a:avLst/>
@@ -6673,10 +6673,10 @@
       </p:sp>
       <p:pic>
         <p:nvPicPr>
-          <p:cNvPr id="3" name="Imagen 2">
+          <p:cNvPr id="4" name="Imagen 3">
             <a:extLst>
               <a:ext uri="{FF2B5EF4-FFF2-40B4-BE49-F238E27FC236}">
-                <a16:creationId xmlns:a16="http://schemas.microsoft.com/office/drawing/2014/main" id="{BE2FC078-2D16-1FAC-9A43-D337A04A5A85}"/>
+                <a16:creationId xmlns:a16="http://schemas.microsoft.com/office/drawing/2014/main" id="{A3722C2C-342E-79CB-E7F4-AF1C0760B29F}"/>
               </a:ext>
             </a:extLst>
           </p:cNvPr>
@@ -6693,8 +6693,8 @@
         </p:blipFill>
         <p:spPr>
           <a:xfrm>
-            <a:off x="0" y="1337988"/>
-            <a:ext cx="9144000" cy="2610399"/>
+            <a:off x="0" y="1350714"/>
+            <a:ext cx="9144000" cy="2584948"/>
           </a:xfrm>
           <a:prstGeom prst="rect">
             <a:avLst/>
@@ -6777,10 +6777,10 @@
       </p:sp>
       <p:pic>
         <p:nvPicPr>
-          <p:cNvPr id="3" name="Imagen 2">
+          <p:cNvPr id="4" name="Imagen 3">
             <a:extLst>
               <a:ext uri="{FF2B5EF4-FFF2-40B4-BE49-F238E27FC236}">
-                <a16:creationId xmlns:a16="http://schemas.microsoft.com/office/drawing/2014/main" id="{3D316830-891B-A2FC-BA11-7C43D29DBB62}"/>
+                <a16:creationId xmlns:a16="http://schemas.microsoft.com/office/drawing/2014/main" id="{2B274B34-0B12-FAD9-3E8F-A9BB1858BDFD}"/>
               </a:ext>
             </a:extLst>
           </p:cNvPr>
@@ -6797,8 +6797,8 @@
         </p:blipFill>
         <p:spPr>
           <a:xfrm>
-            <a:off x="0" y="729869"/>
-            <a:ext cx="9144000" cy="3826637"/>
+            <a:off x="-6725" y="799639"/>
+            <a:ext cx="9144000" cy="3687097"/>
           </a:xfrm>
           <a:prstGeom prst="rect">
             <a:avLst/>
@@ -6875,10 +6875,10 @@
       </p:sp>
       <p:pic>
         <p:nvPicPr>
-          <p:cNvPr id="5" name="Imagen 4">
+          <p:cNvPr id="4" name="Imagen 3">
             <a:extLst>
               <a:ext uri="{FF2B5EF4-FFF2-40B4-BE49-F238E27FC236}">
-                <a16:creationId xmlns:a16="http://schemas.microsoft.com/office/drawing/2014/main" id="{25D2A800-1831-74CA-6BBF-0C19F602E73C}"/>
+                <a16:creationId xmlns:a16="http://schemas.microsoft.com/office/drawing/2014/main" id="{191E4494-07FC-468F-3CF3-15531E7CA351}"/>
               </a:ext>
             </a:extLst>
           </p:cNvPr>
@@ -6895,8 +6895,8 @@
         </p:blipFill>
         <p:spPr>
           <a:xfrm>
-            <a:off x="0" y="1258193"/>
-            <a:ext cx="9144000" cy="2769990"/>
+            <a:off x="-6725" y="1250494"/>
+            <a:ext cx="9144000" cy="2785388"/>
           </a:xfrm>
           <a:prstGeom prst="rect">
             <a:avLst/>
@@ -6973,10 +6973,10 @@
       </p:sp>
       <p:pic>
         <p:nvPicPr>
-          <p:cNvPr id="3" name="Imagen 2">
+          <p:cNvPr id="4" name="Imagen 3">
             <a:extLst>
               <a:ext uri="{FF2B5EF4-FFF2-40B4-BE49-F238E27FC236}">
-                <a16:creationId xmlns:a16="http://schemas.microsoft.com/office/drawing/2014/main" id="{D49A809F-7284-159E-0AFB-F526DC823E8D}"/>
+                <a16:creationId xmlns:a16="http://schemas.microsoft.com/office/drawing/2014/main" id="{D42434C2-98FE-BB58-D502-164BBC3D346D}"/>
               </a:ext>
             </a:extLst>
           </p:cNvPr>
@@ -6993,8 +6993,8 @@
         </p:blipFill>
         <p:spPr>
           <a:xfrm>
-            <a:off x="0" y="732087"/>
-            <a:ext cx="9144000" cy="3822202"/>
+            <a:off x="0" y="1570245"/>
+            <a:ext cx="9144000" cy="2145886"/>
           </a:xfrm>
           <a:prstGeom prst="rect">
             <a:avLst/>
@@ -7071,10 +7071,10 @@
       </p:sp>
       <p:pic>
         <p:nvPicPr>
-          <p:cNvPr id="3" name="Imagen 2">
+          <p:cNvPr id="4" name="Imagen 3">
             <a:extLst>
               <a:ext uri="{FF2B5EF4-FFF2-40B4-BE49-F238E27FC236}">
-                <a16:creationId xmlns:a16="http://schemas.microsoft.com/office/drawing/2014/main" id="{A1168551-E9CA-8E7C-3A1E-F13D4F9ECF68}"/>
+                <a16:creationId xmlns:a16="http://schemas.microsoft.com/office/drawing/2014/main" id="{36D37052-4DFB-7570-9F3B-6A00B38D8F6F}"/>
               </a:ext>
             </a:extLst>
           </p:cNvPr>
@@ -7091,8 +7091,8 @@
         </p:blipFill>
         <p:spPr>
           <a:xfrm>
-            <a:off x="3279592" y="456934"/>
-            <a:ext cx="2584815" cy="4686566"/>
+            <a:off x="3001749" y="837948"/>
+            <a:ext cx="3067478" cy="3610479"/>
           </a:xfrm>
           <a:prstGeom prst="rect">
             <a:avLst/>
